--- a/07_regularization/excel_regularization_slides.pptx
+++ b/07_regularization/excel_regularization_slides.pptx
@@ -3278,16 +3278,8 @@
           </a:bodyPr>
           <a:lstStyle/>
           <a:p>
-            <a:pPr algn="l">
-              <a:defRPr sz="1500" b="1">
-                <a:solidFill>
-                  <a:srgbClr val="475569"/>
-                </a:solidFill>
-                <a:latin typeface="Yu Gothic"/>
-              </a:defRPr>
-            </a:pPr>
-            <a:r>
-              <a:t>訓練Lossと検証Loss、正則化項、停止判定を見る</a:t>
+            <a:r>
+              <a:t>過学習を見つけ、正則化の効き方を見る</a:t>
             </a:r>
           </a:p>
         </p:txBody>
@@ -4905,24 +4897,16 @@
           <a:bodyPr rtlCol="0" anchor="ctr" wrap="square" bIns="36576"/>
           <a:lstStyle/>
           <a:p>
-            <a:pPr algn="ctr">
-              <a:defRPr sz="1700" b="1">
-                <a:solidFill>
-                  <a:srgbClr val="276749"/>
-                </a:solidFill>
-                <a:latin typeface="Yu Gothic"/>
-              </a:defRPr>
-            </a:pPr>
-            <a:r>
-              <a:t>まずは</a:t>
+            <a:r>
+              <a:t>loss_logと</a:t>
             </a:r>
             <a:br/>
             <a:r>
-              <a:t>基本の表</a:t>
+              <a:t>dropoutを</a:t>
             </a:r>
             <a:br/>
             <a:r>
-              <a:t>から読む</a:t>
+              <a:t>切り替えて読む</a:t>
             </a:r>
           </a:p>
         </p:txBody>
@@ -5378,20 +5362,12 @@
           <a:bodyPr rtlCol="0" anchor="ctr" wrap="square" bIns="36576"/>
           <a:lstStyle/>
           <a:p>
-            <a:pPr algn="ctr">
-              <a:defRPr sz="1700" b="1">
-                <a:solidFill>
-                  <a:srgbClr val="2F6690"/>
-                </a:solidFill>
-                <a:latin typeface="Yu Gothic"/>
-              </a:defRPr>
-            </a:pPr>
-            <a:r>
-              <a:t>列名を</a:t>
+            <a:r>
+              <a:t>maskと</a:t>
             </a:r>
             <a:br/>
             <a:r>
-              <a:t>計算の役割に</a:t>
+              <a:t>scaled_activationを</a:t>
             </a:r>
             <a:br/>
             <a:r>
@@ -5851,24 +5827,16 @@
           <a:bodyPr rtlCol="0" anchor="ctr" wrap="square" bIns="36576"/>
           <a:lstStyle/>
           <a:p>
-            <a:pPr algn="ctr">
-              <a:defRPr sz="1700" b="1">
-                <a:solidFill>
-                  <a:srgbClr val="276749"/>
-                </a:solidFill>
-                <a:latin typeface="Yu Gothic"/>
-              </a:defRPr>
-            </a:pPr>
-            <a:r>
-              <a:t>設定を変えたら</a:t>
+            <a:r>
+              <a:t>dropout_rateや</a:t>
             </a:r>
             <a:br/>
             <a:r>
-              <a:t>どの列が動くかを</a:t>
+              <a:t>seedで</a:t>
             </a:r>
             <a:br/>
             <a:r>
-              <a:t>見る</a:t>
+              <a:t>maskの差を見る</a:t>
             </a:r>
           </a:p>
         </p:txBody>
@@ -6463,16 +6431,8 @@
           <a:bodyPr rtlCol="0" anchor="ctr" wrap="square" bIns="36576"/>
           <a:lstStyle/>
           <a:p>
-            <a:pPr algn="ctr">
-              <a:defRPr sz="1400" b="1">
-                <a:solidFill>
-                  <a:srgbClr val="24324B"/>
-                </a:solidFill>
-                <a:latin typeface="Yu Gothic"/>
-              </a:defRPr>
-            </a:pPr>
-            <a:r>
-              <a:t>ここでは下げすぎによる過学習を見る</a:t>
+            <a:r>
+              <a:t>ここでは汎化ギャップと正則化の働きを見る</a:t>
             </a:r>
           </a:p>
         </p:txBody>
@@ -6968,16 +6928,8 @@
           <a:bodyPr rtlCol="0" anchor="ctr" wrap="square" bIns="36576"/>
           <a:lstStyle/>
           <a:p>
-            <a:pPr algn="ctr">
-              <a:defRPr sz="1600" b="1">
-                <a:solidFill>
-                  <a:srgbClr val="24324B"/>
-                </a:solidFill>
-                <a:latin typeface="Yu Gothic"/>
-              </a:defRPr>
-            </a:pPr>
-            <a:r>
-              <a:t>小さくしているのは、式と表の対応を見失わないためです。</a:t>
+            <a:r>
+              <a:t>この回では小さなLoss表とユニット出力で、代表的な正則化の働きに絞ります。</a:t>
             </a:r>
           </a:p>
         </p:txBody>
@@ -7315,16 +7267,8 @@
           </a:bodyPr>
           <a:lstStyle/>
           <a:p>
-            <a:pPr algn="ctr">
-              <a:defRPr sz="1800" b="1">
-                <a:solidFill>
-                  <a:srgbClr val="24324B"/>
-                </a:solidFill>
-                <a:latin typeface="Yu Gothic"/>
-              </a:defRPr>
-            </a:pPr>
-            <a:r>
-              <a:t>訓練Lossと検証Loss、正則化項、停止判定を見る</a:t>
+            <a:r>
+              <a:t>過学習を見つけ、正則化の効き方を見る</a:t>
             </a:r>
           </a:p>
         </p:txBody>
@@ -7449,16 +7393,28 @@
           </a:bodyPr>
           <a:lstStyle/>
           <a:p>
-            <a:pPr algn="l">
-              <a:defRPr sz="2500" b="1">
-                <a:solidFill>
-                  <a:srgbClr val="24324B"/>
-                </a:solidFill>
-                <a:latin typeface="Yu Gothic"/>
-              </a:defRPr>
-            </a:pPr>
             <a:r>
               <a:t>この回の用語</a:t>
+            </a:r>
+          </a:p>
+          <a:p>
+            <a:r>
+              <a:t>Overfitting: 訓練データに寄りすぎる状態</a:t>
+            </a:r>
+          </a:p>
+          <a:p>
+            <a:r>
+              <a:t>L1/L2: 重みにペナルティを足す正則化</a:t>
+            </a:r>
+          </a:p>
+          <a:p>
+            <a:r>
+              <a:t>Dropout: 訓練時に一部のユニットを落とす方法</a:t>
+            </a:r>
+          </a:p>
+          <a:p>
+            <a:r>
+              <a:t>Early Stopping: 検証Lossが悪化したら止める方法</a:t>
             </a:r>
           </a:p>
         </p:txBody>
@@ -8604,16 +8560,8 @@
           <a:bodyPr rtlCol="0" anchor="ctr" wrap="square" bIns="36576"/>
           <a:lstStyle/>
           <a:p>
-            <a:pPr algn="ctr">
-              <a:defRPr sz="1400" b="1">
-                <a:solidFill>
-                  <a:srgbClr val="24324B"/>
-                </a:solidFill>
-                <a:latin typeface="Yu Gothic"/>
-              </a:defRPr>
-            </a:pPr>
-            <a:r>
-              <a:t>訓練だけでなく検証の動きも見る</a:t>
+            <a:r>
+              <a:t>訓練Lossだけで判断しない</a:t>
             </a:r>
           </a:p>
         </p:txBody>
@@ -8738,16 +8686,8 @@
           </a:bodyPr>
           <a:lstStyle/>
           <a:p>
-            <a:pPr algn="l">
-              <a:defRPr sz="2500" b="1">
-                <a:solidFill>
-                  <a:srgbClr val="24324B"/>
-                </a:solidFill>
-                <a:latin typeface="Yu Gothic"/>
-              </a:defRPr>
-            </a:pPr>
-            <a:r>
-              <a:t>訓練Lossと検証Loss、正則化項、停止判定を見る</a:t>
+            <a:r>
+              <a:t>過学習を見つけ、正則化の効き方を見る</a:t>
             </a:r>
           </a:p>
         </p:txBody>
@@ -8774,65 +8714,21 @@
           </a:bodyPr>
           <a:lstStyle/>
           <a:p>
-            <a:pPr>
-              <a:spcAft>
-                <a:spcPts val="800"/>
-              </a:spcAft>
-              <a:defRPr sz="1600">
-                <a:solidFill>
-                  <a:srgbClr val="24324B"/>
-                </a:solidFill>
-                <a:latin typeface="Yu Gothic"/>
-              </a:defRPr>
-            </a:pPr>
-            <a:r>
-              <a:t>• 訓練Lossと検証Loss、正則化項、停止判定を見る</a:t>
-            </a:r>
-          </a:p>
-          <a:p>
-            <a:pPr>
-              <a:spcAft>
-                <a:spcPts val="800"/>
-              </a:spcAft>
-              <a:defRPr sz="1600">
-                <a:solidFill>
-                  <a:srgbClr val="24324B"/>
-                </a:solidFill>
-                <a:latin typeface="Yu Gothic"/>
-              </a:defRPr>
-            </a:pPr>
+            <a:r>
+              <a:t>• 過学習を見つけ、正則化の効き方を見る</a:t>
+            </a:r>
+          </a:p>
+          <a:p>
             <a:r>
               <a:t>• Excel上の値や設定を変更する</a:t>
             </a:r>
           </a:p>
           <a:p>
-            <a:pPr>
-              <a:spcAft>
-                <a:spcPts val="800"/>
-              </a:spcAft>
-              <a:defRPr sz="1600">
-                <a:solidFill>
-                  <a:srgbClr val="24324B"/>
-                </a:solidFill>
-                <a:latin typeface="Yu Gothic"/>
-              </a:defRPr>
-            </a:pPr>
             <a:r>
               <a:t>• PythonがWorkbookから読み直して計算する</a:t>
             </a:r>
           </a:p>
           <a:p>
-            <a:pPr>
-              <a:spcAft>
-                <a:spcPts val="800"/>
-              </a:spcAft>
-              <a:defRPr sz="1600">
-                <a:solidFill>
-                  <a:srgbClr val="24324B"/>
-                </a:solidFill>
-                <a:latin typeface="Yu Gothic"/>
-              </a:defRPr>
-            </a:pPr>
             <a:r>
               <a:t>• 返却表の列を見て変化を確認する</a:t>
             </a:r>
@@ -8880,21 +8776,13 @@
           <a:bodyPr rtlCol="0" anchor="ctr" wrap="square" bIns="36576"/>
           <a:lstStyle/>
           <a:p>
-            <a:pPr algn="ctr">
-              <a:defRPr sz="1100" b="1">
-                <a:solidFill>
-                  <a:srgbClr val="2F6690"/>
-                </a:solidFill>
-                <a:latin typeface="Yu Gothic"/>
-              </a:defRPr>
-            </a:pPr>
             <a:r>
               <a:t>過学習と正則化とは</a:t>
             </a:r>
             <a:br/>
             <a:br/>
             <a:r>
-              <a:t>過学習とは、訓練データには合うのに未知のデータへ弱くなる状態です。正則化はそれを抑えるための工夫です。</a:t>
+              <a:t>過学習とは、訓練データには合うのに未知のデータへ弱くなる状態です。正則化は、重みを抑えたり、一部のユニットを落としたりして依存を弱める工夫です。</a:t>
             </a:r>
           </a:p>
         </p:txBody>
@@ -8940,25 +8828,17 @@
           <a:bodyPr rtlCol="0" anchor="ctr" wrap="square" bIns="36576"/>
           <a:lstStyle/>
           <a:p>
-            <a:pPr algn="ctr">
-              <a:defRPr sz="1500" b="1">
-                <a:solidFill>
-                  <a:srgbClr val="276749"/>
-                </a:solidFill>
-                <a:latin typeface="Yu Gothic"/>
-              </a:defRPr>
-            </a:pPr>
             <a:r>
               <a:t>見える変化</a:t>
             </a:r>
             <a:br/>
             <a:br/>
             <a:r>
-              <a:t>train / valid loss</a:t>
+              <a:t>dropout_rate / seed</a:t>
             </a:r>
             <a:br/>
             <a:r>
-              <a:t>gap</a:t>
+              <a:t>maskと出力</a:t>
             </a:r>
           </a:p>
         </p:txBody>
@@ -10316,16 +10196,8 @@
           <a:bodyPr rtlCol="0" anchor="ctr" wrap="square" bIns="36576"/>
           <a:lstStyle/>
           <a:p>
-            <a:pPr algn="ctr">
-              <a:defRPr sz="1500" b="1">
-                <a:solidFill>
-                  <a:srgbClr val="276749"/>
-                </a:solidFill>
-                <a:latin typeface="Yu Gothic"/>
-              </a:defRPr>
-            </a:pPr>
-            <a:r>
-              <a:t>訓練だけでなく検証の動きも見る</a:t>
+            <a:r>
+              <a:t>訓練Lossだけで判断しない</a:t>
             </a:r>
           </a:p>
         </p:txBody>
@@ -10371,16 +10243,8 @@
           <a:bodyPr rtlCol="0" anchor="ctr" wrap="square" bIns="36576"/>
           <a:lstStyle/>
           <a:p>
-            <a:pPr algn="ctr">
-              <a:defRPr sz="1400" b="1">
-                <a:solidFill>
-                  <a:srgbClr val="276749"/>
-                </a:solidFill>
-                <a:latin typeface="Yu Gothic"/>
-              </a:defRPr>
-            </a:pPr>
-            <a:r>
-              <a:t>訓練だけでなく検証の動きも見る</a:t>
+            <a:r>
+              <a:t>訓練Lossだけで判断しない</a:t>
             </a:r>
           </a:p>
         </p:txBody>
@@ -11546,16 +11410,8 @@
           <a:bodyPr rtlCol="0" anchor="ctr" wrap="square" bIns="36576"/>
           <a:lstStyle/>
           <a:p>
-            <a:pPr algn="ctr">
-              <a:defRPr sz="1500" b="1">
-                <a:solidFill>
-                  <a:srgbClr val="24324B"/>
-                </a:solidFill>
-                <a:latin typeface="Yu Gothic"/>
-              </a:defRPr>
-            </a:pPr>
-            <a:r>
-              <a:t>Excelで変更した値が、そのままPythonの計算結果に反映されます。</a:t>
+            <a:r>
+              <a:t>Dropout率やseedを変えると、Pythonが返すmaskと出力が変わります。</a:t>
             </a:r>
           </a:p>
         </p:txBody>
@@ -11680,16 +11536,8 @@
           </a:bodyPr>
           <a:lstStyle/>
           <a:p>
-            <a:pPr algn="l">
-              <a:defRPr sz="2500" b="1">
-                <a:solidFill>
-                  <a:srgbClr val="24324B"/>
-                </a:solidFill>
-                <a:latin typeface="Yu Gothic"/>
-              </a:defRPr>
-            </a:pPr>
-            <a:r>
-              <a:t>どこを変えると、どの表が変わるか</a:t>
+            <a:r>
+              <a:t>どこを変えると、どの正則化の表が変わるか</a:t>
             </a:r>
           </a:p>
         </p:txBody>
@@ -12058,16 +11906,8 @@
           <a:bodyPr rtlCol="0" anchor="ctr" wrap="square" bIns="36576"/>
           <a:lstStyle/>
           <a:p>
-            <a:pPr algn="ctr">
-              <a:defRPr sz="1500" b="1">
-                <a:solidFill>
-                  <a:srgbClr val="276749"/>
-                </a:solidFill>
-                <a:latin typeface="Yu Gothic"/>
-              </a:defRPr>
-            </a:pPr>
-            <a:r>
-              <a:t>操作の目的は、値を変えた時の表の変化を読むことです。</a:t>
+            <a:r>
+              <a:t>Lossの差、重みペナルティ、Dropout maskを分けて読みます。</a:t>
             </a:r>
           </a:p>
         </p:txBody>
@@ -13368,20 +13208,12 @@
           <a:bodyPr rtlCol="0" anchor="ctr" wrap="square" bIns="36576"/>
           <a:lstStyle/>
           <a:p>
-            <a:pPr algn="ctr">
-              <a:defRPr sz="1800" b="1">
-                <a:solidFill>
-                  <a:srgbClr val="276749"/>
-                </a:solidFill>
-                <a:latin typeface="Yu Gothic"/>
-              </a:defRPr>
-            </a:pPr>
-            <a:r>
-              <a:t>初期値の</a:t>
+            <a:r>
+              <a:t>dropout_traceを</a:t>
             </a:r>
             <a:br/>
             <a:r>
-              <a:t>結果を読む</a:t>
+              <a:t>読む</a:t>
             </a:r>
           </a:p>
         </p:txBody>
